--- a/eval/out/gates_slide3.pptx
+++ b/eval/out/gates_slide3.pptx
@@ -3081,6 +3081,14 @@
 <file path=ppt/slides/slide1.xml><?xml version="1.0" encoding="utf-8"?>
 <p:sld xmlns:a="http://schemas.openxmlformats.org/drawingml/2006/main" xmlns:p="http://schemas.openxmlformats.org/presentationml/2006/main" xmlns:r="http://schemas.openxmlformats.org/officeDocument/2006/relationships">
   <p:cSld>
+    <p:bg>
+      <p:bgPr>
+        <a:solidFill>
+          <a:srgbClr val="FFFFFF"/>
+        </a:solidFill>
+        <a:effectLst/>
+      </p:bgPr>
+    </p:bg>
     <p:spTree>
       <p:nvGrpSpPr>
         <p:cNvPr id="1" name=""/>

--- a/eval/out/gates_slide3.pptx
+++ b/eval/out/gates_slide3.pptx
@@ -3242,17 +3242,63 @@
       </p:sp>
       <p:sp>
         <p:nvSpPr>
-          <p:cNvPr id="3" name="Oval 2"/>
+          <p:cNvPr id="3" name="Rectangle 2"/>
           <p:cNvSpPr/>
           <p:nvPr/>
         </p:nvSpPr>
         <p:spPr>
           <a:xfrm>
-            <a:off x="411480" y="1463040"/>
-            <a:ext cx="384048" cy="384048"/>
+            <a:off x="411480" y="1099333"/>
+            <a:ext cx="11369040" cy="548640"/>
           </a:xfrm>
-          <a:prstGeom prst="ellipse">
+          <a:prstGeom prst="rect">
             <a:avLst/>
+          </a:prstGeom>
+          <a:solidFill>
+            <a:srgbClr val="F2F3F5"/>
+          </a:solidFill>
+          <a:ln>
+            <a:noFill/>
+          </a:ln>
+          <a:effectLst/>
+        </p:spPr>
+        <p:style>
+          <a:lnRef idx="1">
+            <a:schemeClr val="accent1"/>
+          </a:lnRef>
+          <a:fillRef idx="3">
+            <a:schemeClr val="accent1"/>
+          </a:fillRef>
+          <a:effectRef idx="2">
+            <a:schemeClr val="accent1"/>
+          </a:effectRef>
+          <a:fontRef idx="minor">
+            <a:schemeClr val="lt1"/>
+          </a:fontRef>
+        </p:style>
+        <p:txBody>
+          <a:bodyPr rtlCol="0" anchor="ctr"/>
+          <a:lstStyle/>
+          <a:p>
+            <a:pPr algn="ctr"/>
+          </a:p>
+        </p:txBody>
+      </p:sp>
+      <p:sp>
+        <p:nvSpPr>
+          <p:cNvPr id="4" name="Rounded Rectangle 3"/>
+          <p:cNvSpPr/>
+          <p:nvPr/>
+        </p:nvSpPr>
+        <p:spPr>
+          <a:xfrm>
+            <a:off x="457200" y="1122193"/>
+            <a:ext cx="502920" cy="502920"/>
+          </a:xfrm>
+          <a:prstGeom prst="roundRect">
+            <a:avLst>
+              <a:gd name="adj" fmla="val 18000"/>
+            </a:avLst>
           </a:prstGeom>
           <a:solidFill>
             <a:srgbClr val="16294A"/>
@@ -3277,12 +3323,36 @@
           </a:fontRef>
         </p:style>
         <p:txBody>
-          <a:bodyPr rtlCol="0" anchor="ctr" wrap="square" lIns="0" rIns="0" tIns="0" bIns="0">
+          <a:bodyPr rtlCol="0" anchor="ctr"/>
+          <a:lstStyle/>
+          <a:p>
+            <a:pPr algn="ctr"/>
+          </a:p>
+        </p:txBody>
+      </p:sp>
+      <p:sp>
+        <p:nvSpPr>
+          <p:cNvPr id="5" name="TextBox 4"/>
+          <p:cNvSpPr txBox="1"/>
+          <p:nvPr/>
+        </p:nvSpPr>
+        <p:spPr>
+          <a:xfrm>
+            <a:off x="1014984" y="1099333"/>
+            <a:ext cx="391634" cy="548640"/>
+          </a:xfrm>
+          <a:prstGeom prst="rect">
+            <a:avLst/>
+          </a:prstGeom>
+          <a:noFill/>
+        </p:spPr>
+        <p:txBody>
+          <a:bodyPr wrap="square" lIns="0" rIns="0" tIns="0" bIns="0" anchor="ctr">
             <a:noAutofit/>
           </a:bodyPr>
           <a:lstStyle/>
           <a:p>
-            <a:pPr algn="ctr">
+            <a:pPr algn="l">
               <a:spcBef>
                 <a:spcPts val="0"/>
               </a:spcBef>
@@ -3291,27 +3361,27 @@
               </a:spcAft>
             </a:pPr>
             <a:r>
-              <a:rPr sz="1400" b="0" i="0">
-                <a:solidFill>
-                  <a:srgbClr val="FFFFFF"/>
-                </a:solidFill>
-                <a:latin typeface="Segoe UI"/>
-              </a:rPr>
-              <a:t>👥</a:t>
-            </a:r>
-          </a:p>
-        </p:txBody>
-      </p:sp>
-      <p:sp>
-        <p:nvSpPr>
-          <p:cNvPr id="4" name="TextBox 3"/>
+              <a:rPr sz="1350" b="1" i="0">
+                <a:solidFill>
+                  <a:srgbClr val="3F3F3F"/>
+                </a:solidFill>
+                <a:latin typeface="Segoe UI"/>
+              </a:rPr>
+              <a:t>35%</a:t>
+            </a:r>
+          </a:p>
+        </p:txBody>
+      </p:sp>
+      <p:sp>
+        <p:nvSpPr>
+          <p:cNvPr id="6" name="TextBox 5"/>
           <p:cNvSpPr txBox="1"/>
           <p:nvPr/>
         </p:nvSpPr>
         <p:spPr>
           <a:xfrm>
-            <a:off x="850392" y="1463040"/>
-            <a:ext cx="2404628" cy="384048"/>
+            <a:off x="1406618" y="1297639"/>
+            <a:ext cx="10328182" cy="152028"/>
           </a:xfrm>
           <a:prstGeom prst="rect">
             <a:avLst/>
@@ -3319,52 +3389,7 @@
           <a:noFill/>
         </p:spPr>
         <p:txBody>
-          <a:bodyPr wrap="square" lIns="0" rIns="0" tIns="0" bIns="0" anchor="ctr">
-            <a:noAutofit/>
-          </a:bodyPr>
-          <a:lstStyle/>
-          <a:p>
-            <a:pPr algn="l">
-              <a:lnSpc>
-                <a:spcPts val="1795"/>
-              </a:lnSpc>
-              <a:spcBef>
-                <a:spcPts val="0"/>
-              </a:spcBef>
-              <a:spcAft>
-                <a:spcPts val="0"/>
-              </a:spcAft>
-            </a:pPr>
-            <a:r>
-              <a:rPr sz="1350" b="1" i="0">
-                <a:solidFill>
-                  <a:srgbClr val="3F3F3F"/>
-                </a:solidFill>
-                <a:latin typeface="Segoe UI"/>
-              </a:rPr>
-              <a:t>35%</a:t>
-            </a:r>
-          </a:p>
-        </p:txBody>
-      </p:sp>
-      <p:sp>
-        <p:nvSpPr>
-          <p:cNvPr id="5" name="TextBox 4"/>
-          <p:cNvSpPr txBox="1"/>
-          <p:nvPr/>
-        </p:nvSpPr>
-        <p:spPr>
-          <a:xfrm>
-            <a:off x="3309884" y="1463040"/>
-            <a:ext cx="8470636" cy="384048"/>
-          </a:xfrm>
-          <a:prstGeom prst="rect">
-            <a:avLst/>
-          </a:prstGeom>
-          <a:noFill/>
-        </p:spPr>
-        <p:txBody>
-          <a:bodyPr wrap="square" lIns="0" rIns="0" tIns="0" bIns="0" anchor="ctr">
+          <a:bodyPr wrap="square" lIns="0" rIns="0" tIns="0" bIns="0" anchor="t">
             <a:noAutofit/>
           </a:bodyPr>
           <a:lstStyle/>
@@ -3430,1087 +3455,14 @@
       </p:sp>
       <p:sp>
         <p:nvSpPr>
-          <p:cNvPr id="6" name="Oval 5"/>
+          <p:cNvPr id="7" name="Rectangle 6"/>
           <p:cNvSpPr/>
           <p:nvPr/>
         </p:nvSpPr>
         <p:spPr>
           <a:xfrm>
-            <a:off x="411480" y="1956816"/>
-            <a:ext cx="384048" cy="384048"/>
-          </a:xfrm>
-          <a:prstGeom prst="ellipse">
-            <a:avLst/>
-          </a:prstGeom>
-          <a:solidFill>
-            <a:srgbClr val="16294A"/>
-          </a:solidFill>
-          <a:ln>
-            <a:noFill/>
-          </a:ln>
-          <a:effectLst/>
-        </p:spPr>
-        <p:style>
-          <a:lnRef idx="1">
-            <a:schemeClr val="accent1"/>
-          </a:lnRef>
-          <a:fillRef idx="3">
-            <a:schemeClr val="accent1"/>
-          </a:fillRef>
-          <a:effectRef idx="2">
-            <a:schemeClr val="accent1"/>
-          </a:effectRef>
-          <a:fontRef idx="minor">
-            <a:schemeClr val="lt1"/>
-          </a:fontRef>
-        </p:style>
-        <p:txBody>
-          <a:bodyPr rtlCol="0" anchor="ctr" wrap="square" lIns="0" rIns="0" tIns="0" bIns="0">
-            <a:noAutofit/>
-          </a:bodyPr>
-          <a:lstStyle/>
-          <a:p>
-            <a:pPr algn="ctr">
-              <a:spcBef>
-                <a:spcPts val="0"/>
-              </a:spcBef>
-              <a:spcAft>
-                <a:spcPts val="0"/>
-              </a:spcAft>
-            </a:pPr>
-            <a:r>
-              <a:rPr sz="1400" b="0" i="0">
-                <a:solidFill>
-                  <a:srgbClr val="FFFFFF"/>
-                </a:solidFill>
-                <a:latin typeface="Segoe UI"/>
-              </a:rPr>
-              <a:t>💰</a:t>
-            </a:r>
-          </a:p>
-        </p:txBody>
-      </p:sp>
-      <p:sp>
-        <p:nvSpPr>
-          <p:cNvPr id="7" name="TextBox 6"/>
-          <p:cNvSpPr txBox="1"/>
-          <p:nvPr/>
-        </p:nvSpPr>
-        <p:spPr>
-          <a:xfrm>
-            <a:off x="850392" y="1956816"/>
-            <a:ext cx="2404628" cy="384048"/>
-          </a:xfrm>
-          <a:prstGeom prst="rect">
-            <a:avLst/>
-          </a:prstGeom>
-          <a:noFill/>
-        </p:spPr>
-        <p:txBody>
-          <a:bodyPr wrap="square" lIns="0" rIns="0" tIns="0" bIns="0" anchor="ctr">
-            <a:noAutofit/>
-          </a:bodyPr>
-          <a:lstStyle/>
-          <a:p>
-            <a:pPr algn="l">
-              <a:lnSpc>
-                <a:spcPts val="1795"/>
-              </a:lnSpc>
-              <a:spcBef>
-                <a:spcPts val="0"/>
-              </a:spcBef>
-              <a:spcAft>
-                <a:spcPts val="0"/>
-              </a:spcAft>
-            </a:pPr>
-            <a:r>
-              <a:rPr sz="1350" b="1" i="0">
-                <a:solidFill>
-                  <a:srgbClr val="3F3F3F"/>
-                </a:solidFill>
-                <a:latin typeface="Segoe UI"/>
-              </a:rPr>
-              <a:t>$550</a:t>
-            </a:r>
-          </a:p>
-        </p:txBody>
-      </p:sp>
-      <p:sp>
-        <p:nvSpPr>
-          <p:cNvPr id="8" name="TextBox 7"/>
-          <p:cNvSpPr txBox="1"/>
-          <p:nvPr/>
-        </p:nvSpPr>
-        <p:spPr>
-          <a:xfrm>
-            <a:off x="3309884" y="1956816"/>
-            <a:ext cx="8470636" cy="384048"/>
-          </a:xfrm>
-          <a:prstGeom prst="rect">
-            <a:avLst/>
-          </a:prstGeom>
-          <a:noFill/>
-        </p:spPr>
-        <p:txBody>
-          <a:bodyPr wrap="square" lIns="0" rIns="0" tIns="0" bIns="0" anchor="ctr">
-            <a:noAutofit/>
-          </a:bodyPr>
-          <a:lstStyle/>
-          <a:p>
-            <a:pPr algn="l">
-              <a:lnSpc>
-                <a:spcPts val="1197"/>
-              </a:lnSpc>
-              <a:spcBef>
-                <a:spcPts val="0"/>
-              </a:spcBef>
-              <a:spcAft>
-                <a:spcPts val="0"/>
-              </a:spcAft>
-            </a:pPr>
-            <a:r>
-              <a:rPr sz="900" b="0" i="0">
-                <a:solidFill>
-                  <a:srgbClr val="3F3F3F"/>
-                </a:solidFill>
-                <a:latin typeface="Segoe UI"/>
-              </a:rPr>
-              <a:t>increase </a:t>
-            </a:r>
-            <a:r>
-              <a:rPr sz="900" b="0" i="0">
-                <a:solidFill>
-                  <a:srgbClr val="3F3F3F"/>
-                </a:solidFill>
-                <a:latin typeface="Segoe UI"/>
-              </a:rPr>
-              <a:t>in </a:t>
-            </a:r>
-            <a:r>
-              <a:rPr sz="900" b="0" i="0">
-                <a:solidFill>
-                  <a:srgbClr val="3F3F3F"/>
-                </a:solidFill>
-                <a:latin typeface="Segoe UI"/>
-              </a:rPr>
-              <a:t>income </a:t>
-            </a:r>
-            <a:r>
-              <a:rPr sz="900" b="0" i="0">
-                <a:solidFill>
-                  <a:srgbClr val="3F3F3F"/>
-                </a:solidFill>
-                <a:latin typeface="Segoe UI"/>
-              </a:rPr>
-              <a:t>per </a:t>
-            </a:r>
-            <a:r>
-              <a:rPr sz="900" b="0" i="0">
-                <a:solidFill>
-                  <a:srgbClr val="3F3F3F"/>
-                </a:solidFill>
-                <a:latin typeface="Segoe UI"/>
-              </a:rPr>
-              <a:t>SSP </a:t>
-            </a:r>
-            <a:r>
-              <a:rPr sz="900" b="0" i="0">
-                <a:solidFill>
-                  <a:srgbClr val="3F3F3F"/>
-                </a:solidFill>
-                <a:latin typeface="Segoe UI"/>
-              </a:rPr>
-              <a:t>per </a:t>
-            </a:r>
-            <a:r>
-              <a:rPr sz="900" b="0" i="0">
-                <a:solidFill>
-                  <a:srgbClr val="3F3F3F"/>
-                </a:solidFill>
-                <a:latin typeface="Segoe UI"/>
-              </a:rPr>
-              <a:t>year </a:t>
-            </a:r>
-            <a:r>
-              <a:rPr sz="900" b="0" i="0">
-                <a:solidFill>
-                  <a:srgbClr val="3F3F3F"/>
-                </a:solidFill>
-                <a:latin typeface="Segoe UI"/>
-              </a:rPr>
-              <a:t>(2020 </a:t>
-            </a:r>
-            <a:r>
-              <a:rPr sz="900" b="0" i="0">
-                <a:solidFill>
-                  <a:srgbClr val="3F3F3F"/>
-                </a:solidFill>
-                <a:latin typeface="Segoe UI"/>
-              </a:rPr>
-              <a:t>to </a:t>
-            </a:r>
-            <a:r>
-              <a:rPr sz="900" b="0" i="0">
-                <a:solidFill>
-                  <a:srgbClr val="3F3F3F"/>
-                </a:solidFill>
-                <a:latin typeface="Segoe UI"/>
-              </a:rPr>
-              <a:t>2024)</a:t>
-            </a:r>
-          </a:p>
-        </p:txBody>
-      </p:sp>
-      <p:sp>
-        <p:nvSpPr>
-          <p:cNvPr id="9" name="Oval 8"/>
-          <p:cNvSpPr/>
-          <p:nvPr/>
-        </p:nvSpPr>
-        <p:spPr>
-          <a:xfrm>
-            <a:off x="411480" y="2450592"/>
-            <a:ext cx="384048" cy="384048"/>
-          </a:xfrm>
-          <a:prstGeom prst="ellipse">
-            <a:avLst/>
-          </a:prstGeom>
-          <a:solidFill>
-            <a:srgbClr val="16294A"/>
-          </a:solidFill>
-          <a:ln>
-            <a:noFill/>
-          </a:ln>
-          <a:effectLst/>
-        </p:spPr>
-        <p:style>
-          <a:lnRef idx="1">
-            <a:schemeClr val="accent1"/>
-          </a:lnRef>
-          <a:fillRef idx="3">
-            <a:schemeClr val="accent1"/>
-          </a:fillRef>
-          <a:effectRef idx="2">
-            <a:schemeClr val="accent1"/>
-          </a:effectRef>
-          <a:fontRef idx="minor">
-            <a:schemeClr val="lt1"/>
-          </a:fontRef>
-        </p:style>
-        <p:txBody>
-          <a:bodyPr rtlCol="0" anchor="ctr" wrap="square" lIns="0" rIns="0" tIns="0" bIns="0">
-            <a:noAutofit/>
-          </a:bodyPr>
-          <a:lstStyle/>
-          <a:p>
-            <a:pPr algn="ctr">
-              <a:spcBef>
-                <a:spcPts val="0"/>
-              </a:spcBef>
-              <a:spcAft>
-                <a:spcPts val="0"/>
-              </a:spcAft>
-            </a:pPr>
-            <a:r>
-              <a:rPr sz="1400" b="0" i="0">
-                <a:solidFill>
-                  <a:srgbClr val="FFFFFF"/>
-                </a:solidFill>
-                <a:latin typeface="Segoe UI"/>
-              </a:rPr>
-              <a:t>📈</a:t>
-            </a:r>
-          </a:p>
-        </p:txBody>
-      </p:sp>
-      <p:sp>
-        <p:nvSpPr>
-          <p:cNvPr id="10" name="TextBox 9"/>
-          <p:cNvSpPr txBox="1"/>
-          <p:nvPr/>
-        </p:nvSpPr>
-        <p:spPr>
-          <a:xfrm>
-            <a:off x="850392" y="2450592"/>
-            <a:ext cx="2404628" cy="384048"/>
-          </a:xfrm>
-          <a:prstGeom prst="rect">
-            <a:avLst/>
-          </a:prstGeom>
-          <a:noFill/>
-        </p:spPr>
-        <p:txBody>
-          <a:bodyPr wrap="square" lIns="0" rIns="0" tIns="0" bIns="0" anchor="ctr">
-            <a:noAutofit/>
-          </a:bodyPr>
-          <a:lstStyle/>
-          <a:p>
-            <a:pPr algn="l">
-              <a:lnSpc>
-                <a:spcPts val="1795"/>
-              </a:lnSpc>
-              <a:spcBef>
-                <a:spcPts val="0"/>
-              </a:spcBef>
-              <a:spcAft>
-                <a:spcPts val="0"/>
-              </a:spcAft>
-            </a:pPr>
-            <a:r>
-              <a:rPr sz="1350" b="1" i="0">
-                <a:solidFill>
-                  <a:srgbClr val="3F3F3F"/>
-                </a:solidFill>
-                <a:latin typeface="Segoe UI"/>
-              </a:rPr>
-              <a:t>15-100%</a:t>
-            </a:r>
-          </a:p>
-        </p:txBody>
-      </p:sp>
-      <p:sp>
-        <p:nvSpPr>
-          <p:cNvPr id="11" name="TextBox 10"/>
-          <p:cNvSpPr txBox="1"/>
-          <p:nvPr/>
-        </p:nvSpPr>
-        <p:spPr>
-          <a:xfrm>
-            <a:off x="3309884" y="2450592"/>
-            <a:ext cx="8470636" cy="384048"/>
-          </a:xfrm>
-          <a:prstGeom prst="rect">
-            <a:avLst/>
-          </a:prstGeom>
-          <a:noFill/>
-        </p:spPr>
-        <p:txBody>
-          <a:bodyPr wrap="square" lIns="0" rIns="0" tIns="0" bIns="0" anchor="ctr">
-            <a:noAutofit/>
-          </a:bodyPr>
-          <a:lstStyle/>
-          <a:p>
-            <a:pPr algn="l">
-              <a:lnSpc>
-                <a:spcPts val="1197"/>
-              </a:lnSpc>
-              <a:spcBef>
-                <a:spcPts val="0"/>
-              </a:spcBef>
-              <a:spcAft>
-                <a:spcPts val="0"/>
-              </a:spcAft>
-            </a:pPr>
-            <a:r>
-              <a:rPr sz="900" b="0" i="0">
-                <a:solidFill>
-                  <a:srgbClr val="3F3F3F"/>
-                </a:solidFill>
-                <a:latin typeface="Segoe UI"/>
-              </a:rPr>
-              <a:t>productivity </a:t>
-            </a:r>
-            <a:r>
-              <a:rPr sz="900" b="0" i="0">
-                <a:solidFill>
-                  <a:srgbClr val="3F3F3F"/>
-                </a:solidFill>
-                <a:latin typeface="Segoe UI"/>
-              </a:rPr>
-              <a:t>increase </a:t>
-            </a:r>
-            <a:r>
-              <a:rPr sz="900" b="0" i="0">
-                <a:solidFill>
-                  <a:srgbClr val="3F3F3F"/>
-                </a:solidFill>
-                <a:latin typeface="Segoe UI"/>
-              </a:rPr>
-              <a:t>across </a:t>
-            </a:r>
-            <a:r>
-              <a:rPr sz="900" b="0" i="0">
-                <a:solidFill>
-                  <a:srgbClr val="3F3F3F"/>
-                </a:solidFill>
-                <a:latin typeface="Segoe UI"/>
-              </a:rPr>
-              <a:t>high </a:t>
-            </a:r>
-            <a:r>
-              <a:rPr sz="900" b="0" i="0">
-                <a:solidFill>
-                  <a:srgbClr val="3F3F3F"/>
-                </a:solidFill>
-                <a:latin typeface="Segoe UI"/>
-              </a:rPr>
-              <a:t>value </a:t>
-            </a:r>
-            <a:r>
-              <a:rPr sz="900" b="0" i="0">
-                <a:solidFill>
-                  <a:srgbClr val="3F3F3F"/>
-                </a:solidFill>
-                <a:latin typeface="Segoe UI"/>
-              </a:rPr>
-              <a:t>crops</a:t>
-            </a:r>
-          </a:p>
-        </p:txBody>
-      </p:sp>
-      <p:sp>
-        <p:nvSpPr>
-          <p:cNvPr id="12" name="Rectangle 11"/>
-          <p:cNvSpPr/>
-          <p:nvPr/>
-        </p:nvSpPr>
-        <p:spPr>
-          <a:xfrm>
-            <a:off x="411480" y="3054096"/>
-            <a:ext cx="2807970" cy="1234440"/>
-          </a:xfrm>
-          <a:prstGeom prst="rect">
-            <a:avLst/>
-          </a:prstGeom>
-          <a:solidFill>
-            <a:srgbClr val="16294A"/>
-          </a:solidFill>
-          <a:ln>
-            <a:noFill/>
-          </a:ln>
-          <a:effectLst/>
-        </p:spPr>
-        <p:style>
-          <a:lnRef idx="1">
-            <a:schemeClr val="accent1"/>
-          </a:lnRef>
-          <a:fillRef idx="3">
-            <a:schemeClr val="accent1"/>
-          </a:fillRef>
-          <a:effectRef idx="2">
-            <a:schemeClr val="accent1"/>
-          </a:effectRef>
-          <a:fontRef idx="minor">
-            <a:schemeClr val="lt1"/>
-          </a:fontRef>
-        </p:style>
-        <p:txBody>
-          <a:bodyPr rtlCol="0" anchor="ctr" wrap="square" lIns="0" rIns="0" tIns="0" bIns="0">
-            <a:noAutofit/>
-          </a:bodyPr>
-          <a:lstStyle/>
-          <a:p>
-            <a:pPr algn="ctr">
-              <a:lnSpc>
-                <a:spcPts val="1795"/>
-              </a:lnSpc>
-              <a:spcBef>
-                <a:spcPts val="0"/>
-              </a:spcBef>
-              <a:spcAft>
-                <a:spcPts val="0"/>
-              </a:spcAft>
-            </a:pPr>
-            <a:r>
-              <a:rPr sz="1350" b="1" i="0">
-                <a:solidFill>
-                  <a:srgbClr val="FFFFFF"/>
-                </a:solidFill>
-                <a:latin typeface="Segoe UI"/>
-              </a:rPr>
-              <a:t>$2.2B</a:t>
-            </a:r>
-          </a:p>
-          <a:p>
-            <a:pPr algn="ctr">
-              <a:lnSpc>
-                <a:spcPts val="216"/>
-              </a:lnSpc>
-              <a:spcBef>
-                <a:spcPts val="0"/>
-              </a:spcBef>
-              <a:spcAft>
-                <a:spcPts val="0"/>
-              </a:spcAft>
-            </a:pPr>
-            <a:r>
-              <a:rPr sz="750" b="0" i="0">
-                <a:solidFill>
-                  <a:srgbClr val="FFFFFF"/>
-                </a:solidFill>
-                <a:latin typeface="Segoe UI"/>
-              </a:rPr>
-              <a:t/>
-            </a:r>
-          </a:p>
-          <a:p>
-            <a:pPr algn="ctr">
-              <a:lnSpc>
-                <a:spcPts val="997"/>
-              </a:lnSpc>
-              <a:spcBef>
-                <a:spcPts val="0"/>
-              </a:spcBef>
-              <a:spcAft>
-                <a:spcPts val="0"/>
-              </a:spcAft>
-            </a:pPr>
-            <a:r>
-              <a:rPr sz="750" b="0" i="0">
-                <a:solidFill>
-                  <a:srgbClr val="FFFFFF"/>
-                </a:solidFill>
-                <a:latin typeface="Segoe UI"/>
-              </a:rPr>
-              <a:t>leveraged </a:t>
-            </a:r>
-            <a:r>
-              <a:rPr sz="750" b="0" i="0">
-                <a:solidFill>
-                  <a:srgbClr val="FFFFFF"/>
-                </a:solidFill>
-                <a:latin typeface="Segoe UI"/>
-              </a:rPr>
-              <a:t>from </a:t>
-            </a:r>
-            <a:r>
-              <a:rPr sz="750" b="0" i="0">
-                <a:solidFill>
-                  <a:srgbClr val="FFFFFF"/>
-                </a:solidFill>
-                <a:latin typeface="Segoe UI"/>
-              </a:rPr>
-              <a:t>govt, </a:t>
-            </a:r>
-            <a:r>
-              <a:rPr sz="750" b="0" i="0">
-                <a:solidFill>
-                  <a:srgbClr val="FFFFFF"/>
-                </a:solidFill>
-                <a:latin typeface="Segoe UI"/>
-              </a:rPr>
-              <a:t>private </a:t>
-            </a:r>
-            <a:r>
-              <a:rPr sz="750" b="0" i="0">
-                <a:solidFill>
-                  <a:srgbClr val="FFFFFF"/>
-                </a:solidFill>
-                <a:latin typeface="Segoe UI"/>
-              </a:rPr>
-              <a:t>sector </a:t>
-            </a:r>
-            <a:r>
-              <a:rPr sz="750" b="0" i="0">
-                <a:solidFill>
-                  <a:srgbClr val="FFFFFF"/>
-                </a:solidFill>
-                <a:latin typeface="Segoe UI"/>
-              </a:rPr>
-              <a:t>and </a:t>
-            </a:r>
-            <a:r>
-              <a:rPr sz="750" b="0" i="0">
-                <a:solidFill>
-                  <a:srgbClr val="FFFFFF"/>
-                </a:solidFill>
-                <a:latin typeface="Segoe UI"/>
-              </a:rPr>
-              <a:t>IFIs </a:t>
-            </a:r>
-            <a:r>
-              <a:rPr sz="750" b="0" i="0">
-                <a:solidFill>
-                  <a:srgbClr val="FFFFFF"/>
-                </a:solidFill>
-                <a:latin typeface="Segoe UI"/>
-              </a:rPr>
-              <a:t>(2025)</a:t>
-            </a:r>
-          </a:p>
-        </p:txBody>
-      </p:sp>
-      <p:sp>
-        <p:nvSpPr>
-          <p:cNvPr id="13" name="Rectangle 12"/>
-          <p:cNvSpPr/>
-          <p:nvPr/>
-        </p:nvSpPr>
-        <p:spPr>
-          <a:xfrm>
-            <a:off x="3265170" y="3054096"/>
-            <a:ext cx="2807970" cy="1234440"/>
-          </a:xfrm>
-          <a:prstGeom prst="rect">
-            <a:avLst/>
-          </a:prstGeom>
-          <a:solidFill>
-            <a:srgbClr val="16294A"/>
-          </a:solidFill>
-          <a:ln>
-            <a:noFill/>
-          </a:ln>
-          <a:effectLst/>
-        </p:spPr>
-        <p:style>
-          <a:lnRef idx="1">
-            <a:schemeClr val="accent1"/>
-          </a:lnRef>
-          <a:fillRef idx="3">
-            <a:schemeClr val="accent1"/>
-          </a:fillRef>
-          <a:effectRef idx="2">
-            <a:schemeClr val="accent1"/>
-          </a:effectRef>
-          <a:fontRef idx="minor">
-            <a:schemeClr val="lt1"/>
-          </a:fontRef>
-        </p:style>
-        <p:txBody>
-          <a:bodyPr rtlCol="0" anchor="ctr" wrap="square" lIns="0" rIns="0" tIns="0" bIns="0">
-            <a:noAutofit/>
-          </a:bodyPr>
-          <a:lstStyle/>
-          <a:p>
-            <a:pPr algn="ctr">
-              <a:lnSpc>
-                <a:spcPts val="1795"/>
-              </a:lnSpc>
-              <a:spcBef>
-                <a:spcPts val="0"/>
-              </a:spcBef>
-              <a:spcAft>
-                <a:spcPts val="0"/>
-              </a:spcAft>
-            </a:pPr>
-            <a:r>
-              <a:rPr sz="1350" b="1" i="0">
-                <a:solidFill>
-                  <a:srgbClr val="FFFFFF"/>
-                </a:solidFill>
-                <a:latin typeface="Segoe UI"/>
-              </a:rPr>
-              <a:t>60+</a:t>
-            </a:r>
-          </a:p>
-          <a:p>
-            <a:pPr algn="ctr">
-              <a:lnSpc>
-                <a:spcPts val="216"/>
-              </a:lnSpc>
-              <a:spcBef>
-                <a:spcPts val="0"/>
-              </a:spcBef>
-              <a:spcAft>
-                <a:spcPts val="0"/>
-              </a:spcAft>
-            </a:pPr>
-            <a:r>
-              <a:rPr sz="750" b="0" i="0">
-                <a:solidFill>
-                  <a:srgbClr val="FFFFFF"/>
-                </a:solidFill>
-                <a:latin typeface="Segoe UI"/>
-              </a:rPr>
-              <a:t/>
-            </a:r>
-          </a:p>
-          <a:p>
-            <a:pPr algn="ctr">
-              <a:lnSpc>
-                <a:spcPts val="997"/>
-              </a:lnSpc>
-              <a:spcBef>
-                <a:spcPts val="0"/>
-              </a:spcBef>
-              <a:spcAft>
-                <a:spcPts val="0"/>
-              </a:spcAft>
-            </a:pPr>
-            <a:r>
-              <a:rPr sz="750" b="0" i="0">
-                <a:solidFill>
-                  <a:srgbClr val="FFFFFF"/>
-                </a:solidFill>
-                <a:latin typeface="Segoe UI"/>
-              </a:rPr>
-              <a:t>frugal </a:t>
-            </a:r>
-            <a:r>
-              <a:rPr sz="750" b="0" i="0">
-                <a:solidFill>
-                  <a:srgbClr val="FFFFFF"/>
-                </a:solidFill>
-                <a:latin typeface="Segoe UI"/>
-              </a:rPr>
-              <a:t>agri </a:t>
-            </a:r>
-            <a:r>
-              <a:rPr sz="750" b="0" i="0">
-                <a:solidFill>
-                  <a:srgbClr val="FFFFFF"/>
-                </a:solidFill>
-                <a:latin typeface="Segoe UI"/>
-              </a:rPr>
-              <a:t>innovations </a:t>
-            </a:r>
-            <a:r>
-              <a:rPr sz="750" b="0" i="0">
-                <a:solidFill>
-                  <a:srgbClr val="FFFFFF"/>
-                </a:solidFill>
-                <a:latin typeface="Segoe UI"/>
-              </a:rPr>
-              <a:t>for </a:t>
-            </a:r>
-            <a:r>
-              <a:rPr sz="750" b="0" i="0">
-                <a:solidFill>
-                  <a:srgbClr val="FFFFFF"/>
-                </a:solidFill>
-                <a:latin typeface="Segoe UI"/>
-              </a:rPr>
-              <a:t>SSPs </a:t>
-            </a:r>
-            <a:r>
-              <a:rPr sz="750" b="0" i="0">
-                <a:solidFill>
-                  <a:srgbClr val="FFFFFF"/>
-                </a:solidFill>
-                <a:latin typeface="Segoe UI"/>
-              </a:rPr>
-              <a:t>supported</a:t>
-            </a:r>
-          </a:p>
-        </p:txBody>
-      </p:sp>
-      <p:sp>
-        <p:nvSpPr>
-          <p:cNvPr id="14" name="Rectangle 13"/>
-          <p:cNvSpPr/>
-          <p:nvPr/>
-        </p:nvSpPr>
-        <p:spPr>
-          <a:xfrm>
-            <a:off x="6118860" y="3054096"/>
-            <a:ext cx="2807970" cy="1234440"/>
-          </a:xfrm>
-          <a:prstGeom prst="rect">
-            <a:avLst/>
-          </a:prstGeom>
-          <a:solidFill>
-            <a:srgbClr val="16294A"/>
-          </a:solidFill>
-          <a:ln>
-            <a:noFill/>
-          </a:ln>
-          <a:effectLst/>
-        </p:spPr>
-        <p:style>
-          <a:lnRef idx="1">
-            <a:schemeClr val="accent1"/>
-          </a:lnRef>
-          <a:fillRef idx="3">
-            <a:schemeClr val="accent1"/>
-          </a:fillRef>
-          <a:effectRef idx="2">
-            <a:schemeClr val="accent1"/>
-          </a:effectRef>
-          <a:fontRef idx="minor">
-            <a:schemeClr val="lt1"/>
-          </a:fontRef>
-        </p:style>
-        <p:txBody>
-          <a:bodyPr rtlCol="0" anchor="ctr" wrap="square" lIns="0" rIns="0" tIns="0" bIns="0">
-            <a:noAutofit/>
-          </a:bodyPr>
-          <a:lstStyle/>
-          <a:p>
-            <a:pPr algn="ctr">
-              <a:lnSpc>
-                <a:spcPts val="1795"/>
-              </a:lnSpc>
-              <a:spcBef>
-                <a:spcPts val="0"/>
-              </a:spcBef>
-              <a:spcAft>
-                <a:spcPts val="0"/>
-              </a:spcAft>
-            </a:pPr>
-            <a:r>
-              <a:rPr sz="1350" b="1" i="0">
-                <a:solidFill>
-                  <a:srgbClr val="FFFFFF"/>
-                </a:solidFill>
-                <a:latin typeface="Segoe UI"/>
-              </a:rPr>
-              <a:t>150+</a:t>
-            </a:r>
-          </a:p>
-          <a:p>
-            <a:pPr algn="ctr">
-              <a:lnSpc>
-                <a:spcPts val="216"/>
-              </a:lnSpc>
-              <a:spcBef>
-                <a:spcPts val="0"/>
-              </a:spcBef>
-              <a:spcAft>
-                <a:spcPts val="0"/>
-              </a:spcAft>
-            </a:pPr>
-            <a:r>
-              <a:rPr sz="750" b="0" i="0">
-                <a:solidFill>
-                  <a:srgbClr val="FFFFFF"/>
-                </a:solidFill>
-                <a:latin typeface="Segoe UI"/>
-              </a:rPr>
-              <a:t/>
-            </a:r>
-          </a:p>
-          <a:p>
-            <a:pPr algn="ctr">
-              <a:lnSpc>
-                <a:spcPts val="997"/>
-              </a:lnSpc>
-              <a:spcBef>
-                <a:spcPts val="0"/>
-              </a:spcBef>
-              <a:spcAft>
-                <a:spcPts val="0"/>
-              </a:spcAft>
-            </a:pPr>
-            <a:r>
-              <a:rPr sz="750" b="0" i="0">
-                <a:solidFill>
-                  <a:srgbClr val="FFFFFF"/>
-                </a:solidFill>
-                <a:latin typeface="Segoe UI"/>
-              </a:rPr>
-              <a:t>private </a:t>
-            </a:r>
-            <a:r>
-              <a:rPr sz="750" b="0" i="0">
-                <a:solidFill>
-                  <a:srgbClr val="FFFFFF"/>
-                </a:solidFill>
-                <a:latin typeface="Segoe UI"/>
-              </a:rPr>
-              <a:t>companies </a:t>
-            </a:r>
-            <a:r>
-              <a:rPr sz="750" b="0" i="0">
-                <a:solidFill>
-                  <a:srgbClr val="FFFFFF"/>
-                </a:solidFill>
-                <a:latin typeface="Segoe UI"/>
-              </a:rPr>
-              <a:t>engaged </a:t>
-            </a:r>
-            <a:r>
-              <a:rPr sz="750" b="0" i="0">
-                <a:solidFill>
-                  <a:srgbClr val="FFFFFF"/>
-                </a:solidFill>
-                <a:latin typeface="Segoe UI"/>
-              </a:rPr>
-              <a:t>across </a:t>
-            </a:r>
-            <a:r>
-              <a:rPr sz="750" b="0" i="0">
-                <a:solidFill>
-                  <a:srgbClr val="FFFFFF"/>
-                </a:solidFill>
-                <a:latin typeface="Segoe UI"/>
-              </a:rPr>
-              <a:t>value </a:t>
-            </a:r>
-            <a:r>
-              <a:rPr sz="750" b="0" i="0">
-                <a:solidFill>
-                  <a:srgbClr val="FFFFFF"/>
-                </a:solidFill>
-                <a:latin typeface="Segoe UI"/>
-              </a:rPr>
-              <a:t>chain</a:t>
-            </a:r>
-          </a:p>
-        </p:txBody>
-      </p:sp>
-      <p:sp>
-        <p:nvSpPr>
-          <p:cNvPr id="15" name="Rectangle 14"/>
-          <p:cNvSpPr/>
-          <p:nvPr/>
-        </p:nvSpPr>
-        <p:spPr>
-          <a:xfrm>
-            <a:off x="8972550" y="3054096"/>
-            <a:ext cx="2807970" cy="1234440"/>
-          </a:xfrm>
-          <a:prstGeom prst="rect">
-            <a:avLst/>
-          </a:prstGeom>
-          <a:solidFill>
-            <a:srgbClr val="16294A"/>
-          </a:solidFill>
-          <a:ln>
-            <a:noFill/>
-          </a:ln>
-          <a:effectLst/>
-        </p:spPr>
-        <p:style>
-          <a:lnRef idx="1">
-            <a:schemeClr val="accent1"/>
-          </a:lnRef>
-          <a:fillRef idx="3">
-            <a:schemeClr val="accent1"/>
-          </a:fillRef>
-          <a:effectRef idx="2">
-            <a:schemeClr val="accent1"/>
-          </a:effectRef>
-          <a:fontRef idx="minor">
-            <a:schemeClr val="lt1"/>
-          </a:fontRef>
-        </p:style>
-        <p:txBody>
-          <a:bodyPr rtlCol="0" anchor="ctr" wrap="square" lIns="0" rIns="0" tIns="0" bIns="0">
-            <a:noAutofit/>
-          </a:bodyPr>
-          <a:lstStyle/>
-          <a:p>
-            <a:pPr algn="ctr">
-              <a:lnSpc>
-                <a:spcPts val="1795"/>
-              </a:lnSpc>
-              <a:spcBef>
-                <a:spcPts val="0"/>
-              </a:spcBef>
-              <a:spcAft>
-                <a:spcPts val="0"/>
-              </a:spcAft>
-            </a:pPr>
-            <a:r>
-              <a:rPr sz="1350" b="1" i="0">
-                <a:solidFill>
-                  <a:srgbClr val="FFFFFF"/>
-                </a:solidFill>
-                <a:latin typeface="Segoe UI"/>
-              </a:rPr>
-              <a:t>90%</a:t>
-            </a:r>
-          </a:p>
-          <a:p>
-            <a:pPr algn="ctr">
-              <a:lnSpc>
-                <a:spcPts val="216"/>
-              </a:lnSpc>
-              <a:spcBef>
-                <a:spcPts val="0"/>
-              </a:spcBef>
-              <a:spcAft>
-                <a:spcPts val="0"/>
-              </a:spcAft>
-            </a:pPr>
-            <a:r>
-              <a:rPr sz="750" b="0" i="0">
-                <a:solidFill>
-                  <a:srgbClr val="FFFFFF"/>
-                </a:solidFill>
-                <a:latin typeface="Segoe UI"/>
-              </a:rPr>
-              <a:t/>
-            </a:r>
-          </a:p>
-          <a:p>
-            <a:pPr algn="ctr">
-              <a:lnSpc>
-                <a:spcPts val="997"/>
-              </a:lnSpc>
-              <a:spcBef>
-                <a:spcPts val="0"/>
-              </a:spcBef>
-              <a:spcAft>
-                <a:spcPts val="0"/>
-              </a:spcAft>
-            </a:pPr>
-            <a:r>
-              <a:rPr sz="750" b="0" i="0">
-                <a:solidFill>
-                  <a:srgbClr val="FFFFFF"/>
-                </a:solidFill>
-                <a:latin typeface="Segoe UI"/>
-              </a:rPr>
-              <a:t>reduction </a:t>
-            </a:r>
-            <a:r>
-              <a:rPr sz="750" b="0" i="0">
-                <a:solidFill>
-                  <a:srgbClr val="FFFFFF"/>
-                </a:solidFill>
-                <a:latin typeface="Segoe UI"/>
-              </a:rPr>
-              <a:t>in </a:t>
-            </a:r>
-            <a:r>
-              <a:rPr sz="750" b="0" i="0">
-                <a:solidFill>
-                  <a:srgbClr val="FFFFFF"/>
-                </a:solidFill>
-                <a:latin typeface="Segoe UI"/>
-              </a:rPr>
-              <a:t>program </a:t>
-            </a:r>
-            <a:r>
-              <a:rPr sz="750" b="0" i="0">
-                <a:solidFill>
-                  <a:srgbClr val="FFFFFF"/>
-                </a:solidFill>
-                <a:latin typeface="Segoe UI"/>
-              </a:rPr>
-              <a:t>delivery </a:t>
-            </a:r>
-            <a:r>
-              <a:rPr sz="750" b="0" i="0">
-                <a:solidFill>
-                  <a:srgbClr val="FFFFFF"/>
-                </a:solidFill>
-                <a:latin typeface="Segoe UI"/>
-              </a:rPr>
-              <a:t>costs </a:t>
-            </a:r>
-            <a:r>
-              <a:rPr sz="750" b="0" i="0">
-                <a:solidFill>
-                  <a:srgbClr val="FFFFFF"/>
-                </a:solidFill>
-                <a:latin typeface="Segoe UI"/>
-              </a:rPr>
-              <a:t>for </a:t>
-            </a:r>
-            <a:r>
-              <a:rPr sz="750" b="0" i="0">
-                <a:solidFill>
-                  <a:srgbClr val="FFFFFF"/>
-                </a:solidFill>
-                <a:latin typeface="Segoe UI"/>
-              </a:rPr>
-              <a:t>govt</a:t>
-            </a:r>
-          </a:p>
-        </p:txBody>
-      </p:sp>
-      <p:sp>
-        <p:nvSpPr>
-          <p:cNvPr id="16" name="Rectangle 15"/>
-          <p:cNvSpPr/>
-          <p:nvPr/>
-        </p:nvSpPr>
-        <p:spPr>
-          <a:xfrm>
-            <a:off x="411480" y="4590288"/>
-            <a:ext cx="11369040" cy="857094"/>
+            <a:off x="411480" y="1675405"/>
+            <a:ext cx="11369040" cy="548640"/>
           </a:xfrm>
           <a:prstGeom prst="rect">
             <a:avLst/>
@@ -4547,13 +3499,1166 @@
       </p:sp>
       <p:sp>
         <p:nvSpPr>
+          <p:cNvPr id="8" name="Rounded Rectangle 7"/>
+          <p:cNvSpPr/>
+          <p:nvPr/>
+        </p:nvSpPr>
+        <p:spPr>
+          <a:xfrm>
+            <a:off x="457200" y="1698265"/>
+            <a:ext cx="502920" cy="502920"/>
+          </a:xfrm>
+          <a:prstGeom prst="roundRect">
+            <a:avLst>
+              <a:gd name="adj" fmla="val 18000"/>
+            </a:avLst>
+          </a:prstGeom>
+          <a:solidFill>
+            <a:srgbClr val="16294A"/>
+          </a:solidFill>
+          <a:ln>
+            <a:noFill/>
+          </a:ln>
+          <a:effectLst/>
+        </p:spPr>
+        <p:style>
+          <a:lnRef idx="1">
+            <a:schemeClr val="accent1"/>
+          </a:lnRef>
+          <a:fillRef idx="3">
+            <a:schemeClr val="accent1"/>
+          </a:fillRef>
+          <a:effectRef idx="2">
+            <a:schemeClr val="accent1"/>
+          </a:effectRef>
+          <a:fontRef idx="minor">
+            <a:schemeClr val="lt1"/>
+          </a:fontRef>
+        </p:style>
+        <p:txBody>
+          <a:bodyPr rtlCol="0" anchor="ctr"/>
+          <a:lstStyle/>
+          <a:p>
+            <a:pPr algn="ctr"/>
+          </a:p>
+        </p:txBody>
+      </p:sp>
+      <p:sp>
+        <p:nvSpPr>
+          <p:cNvPr id="9" name="TextBox 8"/>
+          <p:cNvSpPr txBox="1"/>
+          <p:nvPr/>
+        </p:nvSpPr>
+        <p:spPr>
+          <a:xfrm>
+            <a:off x="1014984" y="1675405"/>
+            <a:ext cx="440189" cy="548640"/>
+          </a:xfrm>
+          <a:prstGeom prst="rect">
+            <a:avLst/>
+          </a:prstGeom>
+          <a:noFill/>
+        </p:spPr>
+        <p:txBody>
+          <a:bodyPr wrap="square" lIns="0" rIns="0" tIns="0" bIns="0" anchor="ctr">
+            <a:noAutofit/>
+          </a:bodyPr>
+          <a:lstStyle/>
+          <a:p>
+            <a:pPr algn="l">
+              <a:spcBef>
+                <a:spcPts val="0"/>
+              </a:spcBef>
+              <a:spcAft>
+                <a:spcPts val="0"/>
+              </a:spcAft>
+            </a:pPr>
+            <a:r>
+              <a:rPr sz="1350" b="1" i="0">
+                <a:solidFill>
+                  <a:srgbClr val="3F3F3F"/>
+                </a:solidFill>
+                <a:latin typeface="Segoe UI"/>
+              </a:rPr>
+              <a:t>$550</a:t>
+            </a:r>
+          </a:p>
+        </p:txBody>
+      </p:sp>
+      <p:sp>
+        <p:nvSpPr>
+          <p:cNvPr id="10" name="TextBox 9"/>
+          <p:cNvSpPr txBox="1"/>
+          <p:nvPr/>
+        </p:nvSpPr>
+        <p:spPr>
+          <a:xfrm>
+            <a:off x="1455173" y="1873711"/>
+            <a:ext cx="10279627" cy="152028"/>
+          </a:xfrm>
+          <a:prstGeom prst="rect">
+            <a:avLst/>
+          </a:prstGeom>
+          <a:noFill/>
+        </p:spPr>
+        <p:txBody>
+          <a:bodyPr wrap="square" lIns="0" rIns="0" tIns="0" bIns="0" anchor="t">
+            <a:noAutofit/>
+          </a:bodyPr>
+          <a:lstStyle/>
+          <a:p>
+            <a:pPr algn="l">
+              <a:lnSpc>
+                <a:spcPts val="1197"/>
+              </a:lnSpc>
+              <a:spcBef>
+                <a:spcPts val="0"/>
+              </a:spcBef>
+              <a:spcAft>
+                <a:spcPts val="0"/>
+              </a:spcAft>
+            </a:pPr>
+            <a:r>
+              <a:rPr sz="900" b="0" i="0">
+                <a:solidFill>
+                  <a:srgbClr val="3F3F3F"/>
+                </a:solidFill>
+                <a:latin typeface="Segoe UI"/>
+              </a:rPr>
+              <a:t>increase </a:t>
+            </a:r>
+            <a:r>
+              <a:rPr sz="900" b="0" i="0">
+                <a:solidFill>
+                  <a:srgbClr val="3F3F3F"/>
+                </a:solidFill>
+                <a:latin typeface="Segoe UI"/>
+              </a:rPr>
+              <a:t>in </a:t>
+            </a:r>
+            <a:r>
+              <a:rPr sz="900" b="0" i="0">
+                <a:solidFill>
+                  <a:srgbClr val="3F3F3F"/>
+                </a:solidFill>
+                <a:latin typeface="Segoe UI"/>
+              </a:rPr>
+              <a:t>income </a:t>
+            </a:r>
+            <a:r>
+              <a:rPr sz="900" b="0" i="0">
+                <a:solidFill>
+                  <a:srgbClr val="3F3F3F"/>
+                </a:solidFill>
+                <a:latin typeface="Segoe UI"/>
+              </a:rPr>
+              <a:t>per </a:t>
+            </a:r>
+            <a:r>
+              <a:rPr sz="900" b="0" i="0">
+                <a:solidFill>
+                  <a:srgbClr val="3F3F3F"/>
+                </a:solidFill>
+                <a:latin typeface="Segoe UI"/>
+              </a:rPr>
+              <a:t>SSP </a:t>
+            </a:r>
+            <a:r>
+              <a:rPr sz="900" b="0" i="0">
+                <a:solidFill>
+                  <a:srgbClr val="3F3F3F"/>
+                </a:solidFill>
+                <a:latin typeface="Segoe UI"/>
+              </a:rPr>
+              <a:t>per </a:t>
+            </a:r>
+            <a:r>
+              <a:rPr sz="900" b="0" i="0">
+                <a:solidFill>
+                  <a:srgbClr val="3F3F3F"/>
+                </a:solidFill>
+                <a:latin typeface="Segoe UI"/>
+              </a:rPr>
+              <a:t>year </a:t>
+            </a:r>
+            <a:r>
+              <a:rPr sz="900" b="0" i="0">
+                <a:solidFill>
+                  <a:srgbClr val="3F3F3F"/>
+                </a:solidFill>
+                <a:latin typeface="Segoe UI"/>
+              </a:rPr>
+              <a:t>(2020 </a:t>
+            </a:r>
+            <a:r>
+              <a:rPr sz="900" b="0" i="0">
+                <a:solidFill>
+                  <a:srgbClr val="3F3F3F"/>
+                </a:solidFill>
+                <a:latin typeface="Segoe UI"/>
+              </a:rPr>
+              <a:t>to </a:t>
+            </a:r>
+            <a:r>
+              <a:rPr sz="900" b="0" i="0">
+                <a:solidFill>
+                  <a:srgbClr val="3F3F3F"/>
+                </a:solidFill>
+                <a:latin typeface="Segoe UI"/>
+              </a:rPr>
+              <a:t>2024)</a:t>
+            </a:r>
+          </a:p>
+        </p:txBody>
+      </p:sp>
+      <p:sp>
+        <p:nvSpPr>
+          <p:cNvPr id="11" name="Rectangle 10"/>
+          <p:cNvSpPr/>
+          <p:nvPr/>
+        </p:nvSpPr>
+        <p:spPr>
+          <a:xfrm>
+            <a:off x="411480" y="2251477"/>
+            <a:ext cx="11369040" cy="548640"/>
+          </a:xfrm>
+          <a:prstGeom prst="rect">
+            <a:avLst/>
+          </a:prstGeom>
+          <a:solidFill>
+            <a:srgbClr val="F2F3F5"/>
+          </a:solidFill>
+          <a:ln>
+            <a:noFill/>
+          </a:ln>
+          <a:effectLst/>
+        </p:spPr>
+        <p:style>
+          <a:lnRef idx="1">
+            <a:schemeClr val="accent1"/>
+          </a:lnRef>
+          <a:fillRef idx="3">
+            <a:schemeClr val="accent1"/>
+          </a:fillRef>
+          <a:effectRef idx="2">
+            <a:schemeClr val="accent1"/>
+          </a:effectRef>
+          <a:fontRef idx="minor">
+            <a:schemeClr val="lt1"/>
+          </a:fontRef>
+        </p:style>
+        <p:txBody>
+          <a:bodyPr rtlCol="0" anchor="ctr"/>
+          <a:lstStyle/>
+          <a:p>
+            <a:pPr algn="ctr"/>
+          </a:p>
+        </p:txBody>
+      </p:sp>
+      <p:sp>
+        <p:nvSpPr>
+          <p:cNvPr id="12" name="Rounded Rectangle 11"/>
+          <p:cNvSpPr/>
+          <p:nvPr/>
+        </p:nvSpPr>
+        <p:spPr>
+          <a:xfrm>
+            <a:off x="457200" y="2274337"/>
+            <a:ext cx="502920" cy="502920"/>
+          </a:xfrm>
+          <a:prstGeom prst="roundRect">
+            <a:avLst>
+              <a:gd name="adj" fmla="val 18000"/>
+            </a:avLst>
+          </a:prstGeom>
+          <a:solidFill>
+            <a:srgbClr val="16294A"/>
+          </a:solidFill>
+          <a:ln>
+            <a:noFill/>
+          </a:ln>
+          <a:effectLst/>
+        </p:spPr>
+        <p:style>
+          <a:lnRef idx="1">
+            <a:schemeClr val="accent1"/>
+          </a:lnRef>
+          <a:fillRef idx="3">
+            <a:schemeClr val="accent1"/>
+          </a:fillRef>
+          <a:effectRef idx="2">
+            <a:schemeClr val="accent1"/>
+          </a:effectRef>
+          <a:fontRef idx="minor">
+            <a:schemeClr val="lt1"/>
+          </a:fontRef>
+        </p:style>
+        <p:txBody>
+          <a:bodyPr rtlCol="0" anchor="ctr"/>
+          <a:lstStyle/>
+          <a:p>
+            <a:pPr algn="ctr"/>
+          </a:p>
+        </p:txBody>
+      </p:sp>
+      <p:sp>
+        <p:nvSpPr>
+          <p:cNvPr id="13" name="TextBox 12"/>
+          <p:cNvSpPr txBox="1"/>
+          <p:nvPr/>
+        </p:nvSpPr>
+        <p:spPr>
+          <a:xfrm>
+            <a:off x="1014984" y="2251477"/>
+            <a:ext cx="756802" cy="548640"/>
+          </a:xfrm>
+          <a:prstGeom prst="rect">
+            <a:avLst/>
+          </a:prstGeom>
+          <a:noFill/>
+        </p:spPr>
+        <p:txBody>
+          <a:bodyPr wrap="square" lIns="0" rIns="0" tIns="0" bIns="0" anchor="ctr">
+            <a:noAutofit/>
+          </a:bodyPr>
+          <a:lstStyle/>
+          <a:p>
+            <a:pPr algn="l">
+              <a:spcBef>
+                <a:spcPts val="0"/>
+              </a:spcBef>
+              <a:spcAft>
+                <a:spcPts val="0"/>
+              </a:spcAft>
+            </a:pPr>
+            <a:r>
+              <a:rPr sz="1350" b="1" i="0">
+                <a:solidFill>
+                  <a:srgbClr val="3F3F3F"/>
+                </a:solidFill>
+                <a:latin typeface="Segoe UI"/>
+              </a:rPr>
+              <a:t>15-100%</a:t>
+            </a:r>
+          </a:p>
+        </p:txBody>
+      </p:sp>
+      <p:sp>
+        <p:nvSpPr>
+          <p:cNvPr id="14" name="TextBox 13"/>
+          <p:cNvSpPr txBox="1"/>
+          <p:nvPr/>
+        </p:nvSpPr>
+        <p:spPr>
+          <a:xfrm>
+            <a:off x="1771786" y="2449783"/>
+            <a:ext cx="9963014" cy="152028"/>
+          </a:xfrm>
+          <a:prstGeom prst="rect">
+            <a:avLst/>
+          </a:prstGeom>
+          <a:noFill/>
+        </p:spPr>
+        <p:txBody>
+          <a:bodyPr wrap="square" lIns="0" rIns="0" tIns="0" bIns="0" anchor="t">
+            <a:noAutofit/>
+          </a:bodyPr>
+          <a:lstStyle/>
+          <a:p>
+            <a:pPr algn="l">
+              <a:lnSpc>
+                <a:spcPts val="1197"/>
+              </a:lnSpc>
+              <a:spcBef>
+                <a:spcPts val="0"/>
+              </a:spcBef>
+              <a:spcAft>
+                <a:spcPts val="0"/>
+              </a:spcAft>
+            </a:pPr>
+            <a:r>
+              <a:rPr sz="900" b="0" i="0">
+                <a:solidFill>
+                  <a:srgbClr val="3F3F3F"/>
+                </a:solidFill>
+                <a:latin typeface="Segoe UI"/>
+              </a:rPr>
+              <a:t>productivity </a:t>
+            </a:r>
+            <a:r>
+              <a:rPr sz="900" b="0" i="0">
+                <a:solidFill>
+                  <a:srgbClr val="3F3F3F"/>
+                </a:solidFill>
+                <a:latin typeface="Segoe UI"/>
+              </a:rPr>
+              <a:t>increase </a:t>
+            </a:r>
+            <a:r>
+              <a:rPr sz="900" b="0" i="0">
+                <a:solidFill>
+                  <a:srgbClr val="3F3F3F"/>
+                </a:solidFill>
+                <a:latin typeface="Segoe UI"/>
+              </a:rPr>
+              <a:t>across </a:t>
+            </a:r>
+            <a:r>
+              <a:rPr sz="900" b="0" i="0">
+                <a:solidFill>
+                  <a:srgbClr val="3F3F3F"/>
+                </a:solidFill>
+                <a:latin typeface="Segoe UI"/>
+              </a:rPr>
+              <a:t>high </a:t>
+            </a:r>
+            <a:r>
+              <a:rPr sz="900" b="0" i="0">
+                <a:solidFill>
+                  <a:srgbClr val="3F3F3F"/>
+                </a:solidFill>
+                <a:latin typeface="Segoe UI"/>
+              </a:rPr>
+              <a:t>value </a:t>
+            </a:r>
+            <a:r>
+              <a:rPr sz="900" b="0" i="0">
+                <a:solidFill>
+                  <a:srgbClr val="3F3F3F"/>
+                </a:solidFill>
+                <a:latin typeface="Segoe UI"/>
+              </a:rPr>
+              <a:t>crops</a:t>
+            </a:r>
+          </a:p>
+        </p:txBody>
+      </p:sp>
+      <p:sp>
+        <p:nvSpPr>
+          <p:cNvPr id="15" name="Rectangle 14"/>
+          <p:cNvSpPr/>
+          <p:nvPr/>
+        </p:nvSpPr>
+        <p:spPr>
+          <a:xfrm>
+            <a:off x="411480" y="3602174"/>
+            <a:ext cx="2807970" cy="1234440"/>
+          </a:xfrm>
+          <a:prstGeom prst="rect">
+            <a:avLst/>
+          </a:prstGeom>
+          <a:solidFill>
+            <a:srgbClr val="16294A"/>
+          </a:solidFill>
+          <a:ln>
+            <a:noFill/>
+          </a:ln>
+          <a:effectLst>
+            <a:outerShdw blurRad="40000" dist="24000" dir="5400000" rotWithShape="0">
+              <a:srgbClr val="1A1A1A">
+                <a:alpha val="62000"/>
+              </a:srgbClr>
+            </a:outerShdw>
+          </a:effectLst>
+        </p:spPr>
+        <p:style>
+          <a:lnRef idx="1">
+            <a:schemeClr val="accent1"/>
+          </a:lnRef>
+          <a:fillRef idx="3">
+            <a:schemeClr val="accent1"/>
+          </a:fillRef>
+          <a:effectRef idx="2">
+            <a:schemeClr val="accent1"/>
+          </a:effectRef>
+          <a:fontRef idx="minor">
+            <a:schemeClr val="lt1"/>
+          </a:fontRef>
+        </p:style>
+        <p:txBody>
+          <a:bodyPr rtlCol="0" anchor="ctr" wrap="square" lIns="0" rIns="0" tIns="0" bIns="0">
+            <a:noAutofit/>
+          </a:bodyPr>
+          <a:lstStyle/>
+          <a:p>
+            <a:pPr algn="ctr">
+              <a:lnSpc>
+                <a:spcPts val="1795"/>
+              </a:lnSpc>
+              <a:spcBef>
+                <a:spcPts val="0"/>
+              </a:spcBef>
+              <a:spcAft>
+                <a:spcPts val="0"/>
+              </a:spcAft>
+            </a:pPr>
+            <a:r>
+              <a:rPr sz="1350" b="1" i="0">
+                <a:solidFill>
+                  <a:srgbClr val="FFFFFF"/>
+                </a:solidFill>
+                <a:latin typeface="Segoe UI"/>
+              </a:rPr>
+              <a:t>$2.2B</a:t>
+            </a:r>
+          </a:p>
+          <a:p>
+            <a:pPr algn="ctr">
+              <a:lnSpc>
+                <a:spcPts val="216"/>
+              </a:lnSpc>
+              <a:spcBef>
+                <a:spcPts val="0"/>
+              </a:spcBef>
+              <a:spcAft>
+                <a:spcPts val="0"/>
+              </a:spcAft>
+            </a:pPr>
+            <a:r>
+              <a:rPr sz="750" b="0" i="0">
+                <a:solidFill>
+                  <a:srgbClr val="FFFFFF"/>
+                </a:solidFill>
+                <a:latin typeface="Segoe UI"/>
+              </a:rPr>
+              <a:t/>
+            </a:r>
+          </a:p>
+          <a:p>
+            <a:pPr algn="ctr">
+              <a:lnSpc>
+                <a:spcPts val="997"/>
+              </a:lnSpc>
+              <a:spcBef>
+                <a:spcPts val="0"/>
+              </a:spcBef>
+              <a:spcAft>
+                <a:spcPts val="0"/>
+              </a:spcAft>
+            </a:pPr>
+            <a:r>
+              <a:rPr sz="750" b="0" i="0">
+                <a:solidFill>
+                  <a:srgbClr val="FFFFFF"/>
+                </a:solidFill>
+                <a:latin typeface="Segoe UI"/>
+              </a:rPr>
+              <a:t>leveraged </a:t>
+            </a:r>
+            <a:r>
+              <a:rPr sz="750" b="0" i="0">
+                <a:solidFill>
+                  <a:srgbClr val="FFFFFF"/>
+                </a:solidFill>
+                <a:latin typeface="Segoe UI"/>
+              </a:rPr>
+              <a:t>from </a:t>
+            </a:r>
+            <a:r>
+              <a:rPr sz="750" b="0" i="0">
+                <a:solidFill>
+                  <a:srgbClr val="FFFFFF"/>
+                </a:solidFill>
+                <a:latin typeface="Segoe UI"/>
+              </a:rPr>
+              <a:t>govt, </a:t>
+            </a:r>
+            <a:r>
+              <a:rPr sz="750" b="0" i="0">
+                <a:solidFill>
+                  <a:srgbClr val="FFFFFF"/>
+                </a:solidFill>
+                <a:latin typeface="Segoe UI"/>
+              </a:rPr>
+              <a:t>private </a:t>
+            </a:r>
+            <a:r>
+              <a:rPr sz="750" b="0" i="0">
+                <a:solidFill>
+                  <a:srgbClr val="FFFFFF"/>
+                </a:solidFill>
+                <a:latin typeface="Segoe UI"/>
+              </a:rPr>
+              <a:t>sector </a:t>
+            </a:r>
+            <a:r>
+              <a:rPr sz="750" b="0" i="0">
+                <a:solidFill>
+                  <a:srgbClr val="FFFFFF"/>
+                </a:solidFill>
+                <a:latin typeface="Segoe UI"/>
+              </a:rPr>
+              <a:t>and </a:t>
+            </a:r>
+            <a:r>
+              <a:rPr sz="750" b="0" i="0">
+                <a:solidFill>
+                  <a:srgbClr val="FFFFFF"/>
+                </a:solidFill>
+                <a:latin typeface="Segoe UI"/>
+              </a:rPr>
+              <a:t>IFIs </a:t>
+            </a:r>
+            <a:r>
+              <a:rPr sz="750" b="0" i="0">
+                <a:solidFill>
+                  <a:srgbClr val="FFFFFF"/>
+                </a:solidFill>
+                <a:latin typeface="Segoe UI"/>
+              </a:rPr>
+              <a:t>(2025)</a:t>
+            </a:r>
+          </a:p>
+        </p:txBody>
+      </p:sp>
+      <p:sp>
+        <p:nvSpPr>
+          <p:cNvPr id="16" name="Rectangle 15"/>
+          <p:cNvSpPr/>
+          <p:nvPr/>
+        </p:nvSpPr>
+        <p:spPr>
+          <a:xfrm>
+            <a:off x="3265170" y="3602174"/>
+            <a:ext cx="2807970" cy="1234440"/>
+          </a:xfrm>
+          <a:prstGeom prst="rect">
+            <a:avLst/>
+          </a:prstGeom>
+          <a:solidFill>
+            <a:srgbClr val="16294A"/>
+          </a:solidFill>
+          <a:ln>
+            <a:noFill/>
+          </a:ln>
+          <a:effectLst>
+            <a:outerShdw blurRad="40000" dist="24000" dir="5400000" rotWithShape="0">
+              <a:srgbClr val="1A1A1A">
+                <a:alpha val="62000"/>
+              </a:srgbClr>
+            </a:outerShdw>
+          </a:effectLst>
+        </p:spPr>
+        <p:style>
+          <a:lnRef idx="1">
+            <a:schemeClr val="accent1"/>
+          </a:lnRef>
+          <a:fillRef idx="3">
+            <a:schemeClr val="accent1"/>
+          </a:fillRef>
+          <a:effectRef idx="2">
+            <a:schemeClr val="accent1"/>
+          </a:effectRef>
+          <a:fontRef idx="minor">
+            <a:schemeClr val="lt1"/>
+          </a:fontRef>
+        </p:style>
+        <p:txBody>
+          <a:bodyPr rtlCol="0" anchor="ctr" wrap="square" lIns="0" rIns="0" tIns="0" bIns="0">
+            <a:noAutofit/>
+          </a:bodyPr>
+          <a:lstStyle/>
+          <a:p>
+            <a:pPr algn="ctr">
+              <a:lnSpc>
+                <a:spcPts val="1795"/>
+              </a:lnSpc>
+              <a:spcBef>
+                <a:spcPts val="0"/>
+              </a:spcBef>
+              <a:spcAft>
+                <a:spcPts val="0"/>
+              </a:spcAft>
+            </a:pPr>
+            <a:r>
+              <a:rPr sz="1350" b="1" i="0">
+                <a:solidFill>
+                  <a:srgbClr val="FFFFFF"/>
+                </a:solidFill>
+                <a:latin typeface="Segoe UI"/>
+              </a:rPr>
+              <a:t>60+</a:t>
+            </a:r>
+          </a:p>
+          <a:p>
+            <a:pPr algn="ctr">
+              <a:lnSpc>
+                <a:spcPts val="216"/>
+              </a:lnSpc>
+              <a:spcBef>
+                <a:spcPts val="0"/>
+              </a:spcBef>
+              <a:spcAft>
+                <a:spcPts val="0"/>
+              </a:spcAft>
+            </a:pPr>
+            <a:r>
+              <a:rPr sz="750" b="0" i="0">
+                <a:solidFill>
+                  <a:srgbClr val="FFFFFF"/>
+                </a:solidFill>
+                <a:latin typeface="Segoe UI"/>
+              </a:rPr>
+              <a:t/>
+            </a:r>
+          </a:p>
+          <a:p>
+            <a:pPr algn="ctr">
+              <a:lnSpc>
+                <a:spcPts val="997"/>
+              </a:lnSpc>
+              <a:spcBef>
+                <a:spcPts val="0"/>
+              </a:spcBef>
+              <a:spcAft>
+                <a:spcPts val="0"/>
+              </a:spcAft>
+            </a:pPr>
+            <a:r>
+              <a:rPr sz="750" b="0" i="0">
+                <a:solidFill>
+                  <a:srgbClr val="FFFFFF"/>
+                </a:solidFill>
+                <a:latin typeface="Segoe UI"/>
+              </a:rPr>
+              <a:t>frugal </a:t>
+            </a:r>
+            <a:r>
+              <a:rPr sz="750" b="0" i="0">
+                <a:solidFill>
+                  <a:srgbClr val="FFFFFF"/>
+                </a:solidFill>
+                <a:latin typeface="Segoe UI"/>
+              </a:rPr>
+              <a:t>agri </a:t>
+            </a:r>
+            <a:r>
+              <a:rPr sz="750" b="0" i="0">
+                <a:solidFill>
+                  <a:srgbClr val="FFFFFF"/>
+                </a:solidFill>
+                <a:latin typeface="Segoe UI"/>
+              </a:rPr>
+              <a:t>innovations </a:t>
+            </a:r>
+            <a:r>
+              <a:rPr sz="750" b="0" i="0">
+                <a:solidFill>
+                  <a:srgbClr val="FFFFFF"/>
+                </a:solidFill>
+                <a:latin typeface="Segoe UI"/>
+              </a:rPr>
+              <a:t>for </a:t>
+            </a:r>
+            <a:r>
+              <a:rPr sz="750" b="0" i="0">
+                <a:solidFill>
+                  <a:srgbClr val="FFFFFF"/>
+                </a:solidFill>
+                <a:latin typeface="Segoe UI"/>
+              </a:rPr>
+              <a:t>SSPs </a:t>
+            </a:r>
+            <a:r>
+              <a:rPr sz="750" b="0" i="0">
+                <a:solidFill>
+                  <a:srgbClr val="FFFFFF"/>
+                </a:solidFill>
+                <a:latin typeface="Segoe UI"/>
+              </a:rPr>
+              <a:t>supported</a:t>
+            </a:r>
+          </a:p>
+        </p:txBody>
+      </p:sp>
+      <p:sp>
+        <p:nvSpPr>
           <p:cNvPr id="17" name="Rectangle 16"/>
           <p:cNvSpPr/>
           <p:nvPr/>
         </p:nvSpPr>
         <p:spPr>
           <a:xfrm>
-            <a:off x="411480" y="4590288"/>
+            <a:off x="6118860" y="3602174"/>
+            <a:ext cx="2807970" cy="1234440"/>
+          </a:xfrm>
+          <a:prstGeom prst="rect">
+            <a:avLst/>
+          </a:prstGeom>
+          <a:solidFill>
+            <a:srgbClr val="16294A"/>
+          </a:solidFill>
+          <a:ln>
+            <a:noFill/>
+          </a:ln>
+          <a:effectLst>
+            <a:outerShdw blurRad="40000" dist="24000" dir="5400000" rotWithShape="0">
+              <a:srgbClr val="1A1A1A">
+                <a:alpha val="62000"/>
+              </a:srgbClr>
+            </a:outerShdw>
+          </a:effectLst>
+        </p:spPr>
+        <p:style>
+          <a:lnRef idx="1">
+            <a:schemeClr val="accent1"/>
+          </a:lnRef>
+          <a:fillRef idx="3">
+            <a:schemeClr val="accent1"/>
+          </a:fillRef>
+          <a:effectRef idx="2">
+            <a:schemeClr val="accent1"/>
+          </a:effectRef>
+          <a:fontRef idx="minor">
+            <a:schemeClr val="lt1"/>
+          </a:fontRef>
+        </p:style>
+        <p:txBody>
+          <a:bodyPr rtlCol="0" anchor="ctr" wrap="square" lIns="0" rIns="0" tIns="0" bIns="0">
+            <a:noAutofit/>
+          </a:bodyPr>
+          <a:lstStyle/>
+          <a:p>
+            <a:pPr algn="ctr">
+              <a:lnSpc>
+                <a:spcPts val="1795"/>
+              </a:lnSpc>
+              <a:spcBef>
+                <a:spcPts val="0"/>
+              </a:spcBef>
+              <a:spcAft>
+                <a:spcPts val="0"/>
+              </a:spcAft>
+            </a:pPr>
+            <a:r>
+              <a:rPr sz="1350" b="1" i="0">
+                <a:solidFill>
+                  <a:srgbClr val="FFFFFF"/>
+                </a:solidFill>
+                <a:latin typeface="Segoe UI"/>
+              </a:rPr>
+              <a:t>150+</a:t>
+            </a:r>
+          </a:p>
+          <a:p>
+            <a:pPr algn="ctr">
+              <a:lnSpc>
+                <a:spcPts val="216"/>
+              </a:lnSpc>
+              <a:spcBef>
+                <a:spcPts val="0"/>
+              </a:spcBef>
+              <a:spcAft>
+                <a:spcPts val="0"/>
+              </a:spcAft>
+            </a:pPr>
+            <a:r>
+              <a:rPr sz="750" b="0" i="0">
+                <a:solidFill>
+                  <a:srgbClr val="FFFFFF"/>
+                </a:solidFill>
+                <a:latin typeface="Segoe UI"/>
+              </a:rPr>
+              <a:t/>
+            </a:r>
+          </a:p>
+          <a:p>
+            <a:pPr algn="ctr">
+              <a:lnSpc>
+                <a:spcPts val="997"/>
+              </a:lnSpc>
+              <a:spcBef>
+                <a:spcPts val="0"/>
+              </a:spcBef>
+              <a:spcAft>
+                <a:spcPts val="0"/>
+              </a:spcAft>
+            </a:pPr>
+            <a:r>
+              <a:rPr sz="750" b="0" i="0">
+                <a:solidFill>
+                  <a:srgbClr val="FFFFFF"/>
+                </a:solidFill>
+                <a:latin typeface="Segoe UI"/>
+              </a:rPr>
+              <a:t>private </a:t>
+            </a:r>
+            <a:r>
+              <a:rPr sz="750" b="0" i="0">
+                <a:solidFill>
+                  <a:srgbClr val="FFFFFF"/>
+                </a:solidFill>
+                <a:latin typeface="Segoe UI"/>
+              </a:rPr>
+              <a:t>companies </a:t>
+            </a:r>
+            <a:r>
+              <a:rPr sz="750" b="0" i="0">
+                <a:solidFill>
+                  <a:srgbClr val="FFFFFF"/>
+                </a:solidFill>
+                <a:latin typeface="Segoe UI"/>
+              </a:rPr>
+              <a:t>engaged </a:t>
+            </a:r>
+            <a:r>
+              <a:rPr sz="750" b="0" i="0">
+                <a:solidFill>
+                  <a:srgbClr val="FFFFFF"/>
+                </a:solidFill>
+                <a:latin typeface="Segoe UI"/>
+              </a:rPr>
+              <a:t>across </a:t>
+            </a:r>
+            <a:r>
+              <a:rPr sz="750" b="0" i="0">
+                <a:solidFill>
+                  <a:srgbClr val="FFFFFF"/>
+                </a:solidFill>
+                <a:latin typeface="Segoe UI"/>
+              </a:rPr>
+              <a:t>value </a:t>
+            </a:r>
+            <a:r>
+              <a:rPr sz="750" b="0" i="0">
+                <a:solidFill>
+                  <a:srgbClr val="FFFFFF"/>
+                </a:solidFill>
+                <a:latin typeface="Segoe UI"/>
+              </a:rPr>
+              <a:t>chain</a:t>
+            </a:r>
+          </a:p>
+        </p:txBody>
+      </p:sp>
+      <p:sp>
+        <p:nvSpPr>
+          <p:cNvPr id="18" name="Rectangle 17"/>
+          <p:cNvSpPr/>
+          <p:nvPr/>
+        </p:nvSpPr>
+        <p:spPr>
+          <a:xfrm>
+            <a:off x="8972550" y="3602174"/>
+            <a:ext cx="2807970" cy="1234440"/>
+          </a:xfrm>
+          <a:prstGeom prst="rect">
+            <a:avLst/>
+          </a:prstGeom>
+          <a:solidFill>
+            <a:srgbClr val="16294A"/>
+          </a:solidFill>
+          <a:ln>
+            <a:noFill/>
+          </a:ln>
+          <a:effectLst>
+            <a:outerShdw blurRad="40000" dist="24000" dir="5400000" rotWithShape="0">
+              <a:srgbClr val="1A1A1A">
+                <a:alpha val="62000"/>
+              </a:srgbClr>
+            </a:outerShdw>
+          </a:effectLst>
+        </p:spPr>
+        <p:style>
+          <a:lnRef idx="1">
+            <a:schemeClr val="accent1"/>
+          </a:lnRef>
+          <a:fillRef idx="3">
+            <a:schemeClr val="accent1"/>
+          </a:fillRef>
+          <a:effectRef idx="2">
+            <a:schemeClr val="accent1"/>
+          </a:effectRef>
+          <a:fontRef idx="minor">
+            <a:schemeClr val="lt1"/>
+          </a:fontRef>
+        </p:style>
+        <p:txBody>
+          <a:bodyPr rtlCol="0" anchor="ctr" wrap="square" lIns="0" rIns="0" tIns="0" bIns="0">
+            <a:noAutofit/>
+          </a:bodyPr>
+          <a:lstStyle/>
+          <a:p>
+            <a:pPr algn="ctr">
+              <a:lnSpc>
+                <a:spcPts val="1795"/>
+              </a:lnSpc>
+              <a:spcBef>
+                <a:spcPts val="0"/>
+              </a:spcBef>
+              <a:spcAft>
+                <a:spcPts val="0"/>
+              </a:spcAft>
+            </a:pPr>
+            <a:r>
+              <a:rPr sz="1350" b="1" i="0">
+                <a:solidFill>
+                  <a:srgbClr val="FFFFFF"/>
+                </a:solidFill>
+                <a:latin typeface="Segoe UI"/>
+              </a:rPr>
+              <a:t>90%</a:t>
+            </a:r>
+          </a:p>
+          <a:p>
+            <a:pPr algn="ctr">
+              <a:lnSpc>
+                <a:spcPts val="216"/>
+              </a:lnSpc>
+              <a:spcBef>
+                <a:spcPts val="0"/>
+              </a:spcBef>
+              <a:spcAft>
+                <a:spcPts val="0"/>
+              </a:spcAft>
+            </a:pPr>
+            <a:r>
+              <a:rPr sz="750" b="0" i="0">
+                <a:solidFill>
+                  <a:srgbClr val="FFFFFF"/>
+                </a:solidFill>
+                <a:latin typeface="Segoe UI"/>
+              </a:rPr>
+              <a:t/>
+            </a:r>
+          </a:p>
+          <a:p>
+            <a:pPr algn="ctr">
+              <a:lnSpc>
+                <a:spcPts val="997"/>
+              </a:lnSpc>
+              <a:spcBef>
+                <a:spcPts val="0"/>
+              </a:spcBef>
+              <a:spcAft>
+                <a:spcPts val="0"/>
+              </a:spcAft>
+            </a:pPr>
+            <a:r>
+              <a:rPr sz="750" b="0" i="0">
+                <a:solidFill>
+                  <a:srgbClr val="FFFFFF"/>
+                </a:solidFill>
+                <a:latin typeface="Segoe UI"/>
+              </a:rPr>
+              <a:t>reduction </a:t>
+            </a:r>
+            <a:r>
+              <a:rPr sz="750" b="0" i="0">
+                <a:solidFill>
+                  <a:srgbClr val="FFFFFF"/>
+                </a:solidFill>
+                <a:latin typeface="Segoe UI"/>
+              </a:rPr>
+              <a:t>in </a:t>
+            </a:r>
+            <a:r>
+              <a:rPr sz="750" b="0" i="0">
+                <a:solidFill>
+                  <a:srgbClr val="FFFFFF"/>
+                </a:solidFill>
+                <a:latin typeface="Segoe UI"/>
+              </a:rPr>
+              <a:t>program </a:t>
+            </a:r>
+            <a:r>
+              <a:rPr sz="750" b="0" i="0">
+                <a:solidFill>
+                  <a:srgbClr val="FFFFFF"/>
+                </a:solidFill>
+                <a:latin typeface="Segoe UI"/>
+              </a:rPr>
+              <a:t>delivery </a:t>
+            </a:r>
+            <a:r>
+              <a:rPr sz="750" b="0" i="0">
+                <a:solidFill>
+                  <a:srgbClr val="FFFFFF"/>
+                </a:solidFill>
+                <a:latin typeface="Segoe UI"/>
+              </a:rPr>
+              <a:t>costs </a:t>
+            </a:r>
+            <a:r>
+              <a:rPr sz="750" b="0" i="0">
+                <a:solidFill>
+                  <a:srgbClr val="FFFFFF"/>
+                </a:solidFill>
+                <a:latin typeface="Segoe UI"/>
+              </a:rPr>
+              <a:t>for </a:t>
+            </a:r>
+            <a:r>
+              <a:rPr sz="750" b="0" i="0">
+                <a:solidFill>
+                  <a:srgbClr val="FFFFFF"/>
+                </a:solidFill>
+                <a:latin typeface="Segoe UI"/>
+              </a:rPr>
+              <a:t>govt</a:t>
+            </a:r>
+          </a:p>
+        </p:txBody>
+      </p:sp>
+      <p:sp>
+        <p:nvSpPr>
+          <p:cNvPr id="19" name="Rectangle 18"/>
+          <p:cNvSpPr/>
+          <p:nvPr/>
+        </p:nvSpPr>
+        <p:spPr>
+          <a:xfrm>
+            <a:off x="411480" y="5138366"/>
+            <a:ext cx="11369040" cy="857094"/>
+          </a:xfrm>
+          <a:prstGeom prst="rect">
+            <a:avLst/>
+          </a:prstGeom>
+          <a:solidFill>
+            <a:srgbClr val="E8EBEF"/>
+          </a:solidFill>
+          <a:ln>
+            <a:noFill/>
+          </a:ln>
+          <a:effectLst>
+            <a:outerShdw blurRad="40000" dist="24000" dir="5400000" rotWithShape="0">
+              <a:srgbClr val="1A1A1A">
+                <a:alpha val="62000"/>
+              </a:srgbClr>
+            </a:outerShdw>
+          </a:effectLst>
+        </p:spPr>
+        <p:style>
+          <a:lnRef idx="1">
+            <a:schemeClr val="accent1"/>
+          </a:lnRef>
+          <a:fillRef idx="3">
+            <a:schemeClr val="accent1"/>
+          </a:fillRef>
+          <a:effectRef idx="2">
+            <a:schemeClr val="accent1"/>
+          </a:effectRef>
+          <a:fontRef idx="minor">
+            <a:schemeClr val="lt1"/>
+          </a:fontRef>
+        </p:style>
+        <p:txBody>
+          <a:bodyPr rtlCol="0" anchor="ctr"/>
+          <a:lstStyle/>
+          <a:p>
+            <a:pPr algn="ctr"/>
+          </a:p>
+        </p:txBody>
+      </p:sp>
+      <p:sp>
+        <p:nvSpPr>
+          <p:cNvPr id="20" name="Rectangle 19"/>
+          <p:cNvSpPr/>
+          <p:nvPr/>
+        </p:nvSpPr>
+        <p:spPr>
+          <a:xfrm>
+            <a:off x="411480" y="5138366"/>
             <a:ext cx="32004" cy="857094"/>
           </a:xfrm>
           <a:prstGeom prst="rect">
@@ -4591,13 +4696,13 @@
       </p:sp>
       <p:sp>
         <p:nvSpPr>
-          <p:cNvPr id="18" name="TextBox 17"/>
+          <p:cNvPr id="21" name="TextBox 20"/>
           <p:cNvSpPr txBox="1"/>
           <p:nvPr/>
         </p:nvSpPr>
         <p:spPr>
           <a:xfrm>
-            <a:off x="484632" y="4663440"/>
+            <a:off x="484632" y="5211518"/>
             <a:ext cx="11222736" cy="236488"/>
           </a:xfrm>
           <a:prstGeom prst="rect">
@@ -4690,13 +4795,13 @@
       </p:sp>
       <p:sp>
         <p:nvSpPr>
-          <p:cNvPr id="19" name="TextBox 18"/>
+          <p:cNvPr id="22" name="TextBox 21"/>
           <p:cNvSpPr txBox="1"/>
           <p:nvPr/>
         </p:nvSpPr>
         <p:spPr>
           <a:xfrm>
-            <a:off x="484632" y="4936504"/>
+            <a:off x="484632" y="5484582"/>
             <a:ext cx="11222736" cy="152028"/>
           </a:xfrm>
           <a:prstGeom prst="rect">
@@ -4960,13 +5065,13 @@
       </p:sp>
       <p:sp>
         <p:nvSpPr>
-          <p:cNvPr id="20" name="TextBox 19"/>
+          <p:cNvPr id="23" name="TextBox 22"/>
           <p:cNvSpPr txBox="1"/>
           <p:nvPr/>
         </p:nvSpPr>
         <p:spPr>
           <a:xfrm>
-            <a:off x="411480" y="5614250"/>
+            <a:off x="411480" y="6162328"/>
             <a:ext cx="11369040" cy="126690"/>
           </a:xfrm>
           <a:prstGeom prst="rect">
@@ -5041,7 +5146,7 @@
       </p:sp>
       <p:cxnSp>
         <p:nvCxnSpPr>
-          <p:cNvPr id="21" name="Connector 20"/>
+          <p:cNvPr id="24" name="Connector 23"/>
           <p:cNvCxnSpPr/>
           <p:nvPr/>
         </p:nvCxnSpPr>
@@ -5076,7 +5181,7 @@
       </p:cxnSp>
       <p:sp>
         <p:nvSpPr>
-          <p:cNvPr id="22" name="TextBox 21"/>
+          <p:cNvPr id="25" name="TextBox 24"/>
           <p:cNvSpPr txBox="1"/>
           <p:nvPr/>
         </p:nvSpPr>
@@ -5118,7 +5223,7 @@
       </p:sp>
       <p:sp>
         <p:nvSpPr>
-          <p:cNvPr id="23" name="TextBox 22"/>
+          <p:cNvPr id="26" name="TextBox 25"/>
           <p:cNvSpPr txBox="1"/>
           <p:nvPr/>
         </p:nvSpPr>

--- a/eval/out/gates_slide3.pptx
+++ b/eval/out/gates_slide3.pptx
@@ -3104,8 +3104,8 @@
         </p:nvSpPr>
         <p:spPr>
           <a:xfrm>
-            <a:off x="411480" y="518638"/>
-            <a:ext cx="11369040" cy="288603"/>
+            <a:off x="411480" y="274320"/>
+            <a:ext cx="11369040" cy="295818"/>
           </a:xfrm>
           <a:prstGeom prst="rect">
             <a:avLst/>
@@ -3120,7 +3120,7 @@
           <a:p>
             <a:pPr algn="l">
               <a:lnSpc>
-                <a:spcPts val="2272"/>
+                <a:spcPts val="2329"/>
               </a:lnSpc>
               <a:spcBef>
                 <a:spcPts val="0"/>
@@ -3248,7 +3248,7 @@
         </p:nvSpPr>
         <p:spPr>
           <a:xfrm>
-            <a:off x="411480" y="1099333"/>
+            <a:off x="411480" y="1093495"/>
             <a:ext cx="11369040" cy="548640"/>
           </a:xfrm>
           <a:prstGeom prst="rect">
@@ -3292,7 +3292,7 @@
         </p:nvSpPr>
         <p:spPr>
           <a:xfrm>
-            <a:off x="457200" y="1122193"/>
+            <a:off x="457200" y="1116355"/>
             <a:ext cx="502920" cy="502920"/>
           </a:xfrm>
           <a:prstGeom prst="roundRect">
@@ -3338,7 +3338,7 @@
         </p:nvSpPr>
         <p:spPr>
           <a:xfrm>
-            <a:off x="1014984" y="1099333"/>
+            <a:off x="1014984" y="1093495"/>
             <a:ext cx="391634" cy="548640"/>
           </a:xfrm>
           <a:prstGeom prst="rect">
@@ -3380,8 +3380,8 @@
         </p:nvSpPr>
         <p:spPr>
           <a:xfrm>
-            <a:off x="1406618" y="1297639"/>
-            <a:ext cx="10328182" cy="152028"/>
+            <a:off x="1406618" y="1289900"/>
+            <a:ext cx="10328182" cy="155829"/>
           </a:xfrm>
           <a:prstGeom prst="rect">
             <a:avLst/>
@@ -3396,7 +3396,7 @@
           <a:p>
             <a:pPr algn="l">
               <a:lnSpc>
-                <a:spcPts val="1197"/>
+                <a:spcPts val="1227"/>
               </a:lnSpc>
               <a:spcBef>
                 <a:spcPts val="0"/>
@@ -3461,7 +3461,7 @@
         </p:nvSpPr>
         <p:spPr>
           <a:xfrm>
-            <a:off x="411480" y="1675405"/>
+            <a:off x="411480" y="1669567"/>
             <a:ext cx="11369040" cy="548640"/>
           </a:xfrm>
           <a:prstGeom prst="rect">
@@ -3505,7 +3505,7 @@
         </p:nvSpPr>
         <p:spPr>
           <a:xfrm>
-            <a:off x="457200" y="1698265"/>
+            <a:off x="457200" y="1692427"/>
             <a:ext cx="502920" cy="502920"/>
           </a:xfrm>
           <a:prstGeom prst="roundRect">
@@ -3551,7 +3551,7 @@
         </p:nvSpPr>
         <p:spPr>
           <a:xfrm>
-            <a:off x="1014984" y="1675405"/>
+            <a:off x="1014984" y="1669567"/>
             <a:ext cx="440189" cy="548640"/>
           </a:xfrm>
           <a:prstGeom prst="rect">
@@ -3593,8 +3593,8 @@
         </p:nvSpPr>
         <p:spPr>
           <a:xfrm>
-            <a:off x="1455173" y="1873711"/>
-            <a:ext cx="10279627" cy="152028"/>
+            <a:off x="1455173" y="1865972"/>
+            <a:ext cx="10279627" cy="155829"/>
           </a:xfrm>
           <a:prstGeom prst="rect">
             <a:avLst/>
@@ -3609,7 +3609,7 @@
           <a:p>
             <a:pPr algn="l">
               <a:lnSpc>
-                <a:spcPts val="1197"/>
+                <a:spcPts val="1227"/>
               </a:lnSpc>
               <a:spcBef>
                 <a:spcPts val="0"/>
@@ -3719,7 +3719,7 @@
         </p:nvSpPr>
         <p:spPr>
           <a:xfrm>
-            <a:off x="411480" y="2251477"/>
+            <a:off x="411480" y="2245639"/>
             <a:ext cx="11369040" cy="548640"/>
           </a:xfrm>
           <a:prstGeom prst="rect">
@@ -3763,7 +3763,7 @@
         </p:nvSpPr>
         <p:spPr>
           <a:xfrm>
-            <a:off x="457200" y="2274337"/>
+            <a:off x="457200" y="2268499"/>
             <a:ext cx="502920" cy="502920"/>
           </a:xfrm>
           <a:prstGeom prst="roundRect">
@@ -3809,7 +3809,7 @@
         </p:nvSpPr>
         <p:spPr>
           <a:xfrm>
-            <a:off x="1014984" y="2251477"/>
+            <a:off x="1014984" y="2245639"/>
             <a:ext cx="756802" cy="548640"/>
           </a:xfrm>
           <a:prstGeom prst="rect">
@@ -3851,8 +3851,8 @@
         </p:nvSpPr>
         <p:spPr>
           <a:xfrm>
-            <a:off x="1771786" y="2449783"/>
-            <a:ext cx="9963014" cy="152028"/>
+            <a:off x="1771786" y="2442044"/>
+            <a:ext cx="9963014" cy="155829"/>
           </a:xfrm>
           <a:prstGeom prst="rect">
             <a:avLst/>
@@ -3867,7 +3867,7 @@
           <a:p>
             <a:pPr algn="l">
               <a:lnSpc>
-                <a:spcPts val="1197"/>
+                <a:spcPts val="1227"/>
               </a:lnSpc>
               <a:spcBef>
                 <a:spcPts val="0"/>
@@ -3941,7 +3941,7 @@
         </p:nvSpPr>
         <p:spPr>
           <a:xfrm>
-            <a:off x="411480" y="3602174"/>
+            <a:off x="411480" y="3591382"/>
             <a:ext cx="2807970" cy="1234440"/>
           </a:xfrm>
           <a:prstGeom prst="rect">
@@ -3983,7 +3983,7 @@
           <a:p>
             <a:pPr algn="ctr">
               <a:lnSpc>
-                <a:spcPts val="1795"/>
+                <a:spcPts val="1840"/>
               </a:lnSpc>
               <a:spcBef>
                 <a:spcPts val="0"/>
@@ -4027,7 +4027,7 @@
           <a:p>
             <a:pPr algn="ctr">
               <a:lnSpc>
-                <a:spcPts val="997"/>
+                <a:spcPts val="1022"/>
               </a:lnSpc>
               <a:spcBef>
                 <a:spcPts val="0"/>
@@ -4119,7 +4119,7 @@
         </p:nvSpPr>
         <p:spPr>
           <a:xfrm>
-            <a:off x="3265170" y="3602174"/>
+            <a:off x="3265170" y="3591382"/>
             <a:ext cx="2807970" cy="1234440"/>
           </a:xfrm>
           <a:prstGeom prst="rect">
@@ -4161,7 +4161,7 @@
           <a:p>
             <a:pPr algn="ctr">
               <a:lnSpc>
-                <a:spcPts val="1795"/>
+                <a:spcPts val="1840"/>
               </a:lnSpc>
               <a:spcBef>
                 <a:spcPts val="0"/>
@@ -4205,7 +4205,7 @@
           <a:p>
             <a:pPr algn="ctr">
               <a:lnSpc>
-                <a:spcPts val="997"/>
+                <a:spcPts val="1022"/>
               </a:lnSpc>
               <a:spcBef>
                 <a:spcPts val="0"/>
@@ -4279,7 +4279,7 @@
         </p:nvSpPr>
         <p:spPr>
           <a:xfrm>
-            <a:off x="6118860" y="3602174"/>
+            <a:off x="6118860" y="3591382"/>
             <a:ext cx="2807970" cy="1234440"/>
           </a:xfrm>
           <a:prstGeom prst="rect">
@@ -4321,7 +4321,7 @@
           <a:p>
             <a:pPr algn="ctr">
               <a:lnSpc>
-                <a:spcPts val="1795"/>
+                <a:spcPts val="1840"/>
               </a:lnSpc>
               <a:spcBef>
                 <a:spcPts val="0"/>
@@ -4365,7 +4365,7 @@
           <a:p>
             <a:pPr algn="ctr">
               <a:lnSpc>
-                <a:spcPts val="997"/>
+                <a:spcPts val="1022"/>
               </a:lnSpc>
               <a:spcBef>
                 <a:spcPts val="0"/>
@@ -4439,7 +4439,7 @@
         </p:nvSpPr>
         <p:spPr>
           <a:xfrm>
-            <a:off x="8972550" y="3602174"/>
+            <a:off x="8972550" y="3591382"/>
             <a:ext cx="2807970" cy="1234440"/>
           </a:xfrm>
           <a:prstGeom prst="rect">
@@ -4481,7 +4481,7 @@
           <a:p>
             <a:pPr algn="ctr">
               <a:lnSpc>
-                <a:spcPts val="1795"/>
+                <a:spcPts val="1840"/>
               </a:lnSpc>
               <a:spcBef>
                 <a:spcPts val="0"/>
@@ -4525,7 +4525,7 @@
           <a:p>
             <a:pPr algn="ctr">
               <a:lnSpc>
-                <a:spcPts val="997"/>
+                <a:spcPts val="1022"/>
               </a:lnSpc>
               <a:spcBef>
                 <a:spcPts val="0"/>
@@ -4608,8 +4608,8 @@
         </p:nvSpPr>
         <p:spPr>
           <a:xfrm>
-            <a:off x="411480" y="5138366"/>
-            <a:ext cx="11369040" cy="857094"/>
+            <a:off x="411480" y="5127574"/>
+            <a:ext cx="11369040" cy="871664"/>
           </a:xfrm>
           <a:prstGeom prst="rect">
             <a:avLst/>
@@ -4658,8 +4658,8 @@
         </p:nvSpPr>
         <p:spPr>
           <a:xfrm>
-            <a:off x="411480" y="5138366"/>
-            <a:ext cx="32004" cy="857094"/>
+            <a:off x="411480" y="5127574"/>
+            <a:ext cx="32004" cy="871664"/>
           </a:xfrm>
           <a:prstGeom prst="rect">
             <a:avLst/>
@@ -4702,8 +4702,8 @@
         </p:nvSpPr>
         <p:spPr>
           <a:xfrm>
-            <a:off x="484632" y="5211518"/>
-            <a:ext cx="11222736" cy="236488"/>
+            <a:off x="484632" y="5200726"/>
+            <a:ext cx="11222736" cy="242400"/>
           </a:xfrm>
           <a:prstGeom prst="rect">
             <a:avLst/>
@@ -4718,7 +4718,7 @@
           <a:p>
             <a:pPr algn="l">
               <a:lnSpc>
-                <a:spcPts val="1862"/>
+                <a:spcPts val="1908"/>
               </a:lnSpc>
               <a:spcBef>
                 <a:spcPts val="0"/>
@@ -4801,8 +4801,8 @@
         </p:nvSpPr>
         <p:spPr>
           <a:xfrm>
-            <a:off x="484632" y="5484582"/>
-            <a:ext cx="11222736" cy="152028"/>
+            <a:off x="484632" y="5479702"/>
+            <a:ext cx="11222736" cy="155829"/>
           </a:xfrm>
           <a:prstGeom prst="rect">
             <a:avLst/>
@@ -4817,7 +4817,7 @@
           <a:p>
             <a:pPr algn="l">
               <a:lnSpc>
-                <a:spcPts val="1197"/>
+                <a:spcPts val="1227"/>
               </a:lnSpc>
               <a:spcBef>
                 <a:spcPts val="0"/>
@@ -5071,8 +5071,8 @@
         </p:nvSpPr>
         <p:spPr>
           <a:xfrm>
-            <a:off x="411480" y="6162328"/>
-            <a:ext cx="11369040" cy="126690"/>
+            <a:off x="411480" y="6164999"/>
+            <a:ext cx="11369040" cy="129857"/>
           </a:xfrm>
           <a:prstGeom prst="rect">
             <a:avLst/>
@@ -5087,7 +5087,7 @@
           <a:p>
             <a:pPr algn="l">
               <a:lnSpc>
-                <a:spcPts val="997"/>
+                <a:spcPts val="1022"/>
               </a:lnSpc>
               <a:spcBef>
                 <a:spcPts val="0"/>
